--- a/assets/plc/2026-10-27_Lesson_Internalization_Color-Coded_CER_Evidence_to_Feedback_and_Revision.pptx
+++ b/assets/plc/2026-10-27_Lesson_Internalization_Color-Coded_CER_Evidence_to_Feedback_and_Revision.pptx
@@ -4507,7 +4507,7 @@
                 <a:ea typeface="Inter" pitchFamily="34" charset="-122"/>
                 <a:cs typeface="Inter" pitchFamily="34" charset="-120"/>
               </a:rPr>
-              <a:t> Students will revise, annotate, add evidence, explain, compare, correct, or apply learning.</a:t>
+              <a:t> Students will identify, complete, or revise the claim, evidence, or reasoning; then explain, compare, correct, or apply learning.</a:t>
             </a:r>
             <a:endParaRPr lang="en-US" sz="2100" dirty="0"/>
           </a:p>
@@ -4585,7 +4585,7 @@
                 <a:ea typeface="Inter" pitchFamily="34" charset="-122"/>
                 <a:cs typeface="Inter" pitchFamily="34" charset="-120"/>
               </a:rPr>
-              <a:t> What revised writing or comparable science response would show the action worked? Use CUBS/CER only where it makes the thinking easier to see.</a:t>
+              <a:t> What completed or revised CER would show the action worked and met the criterion? Use CUBS/CER only where it makes the thinking easier to see.</a:t>
             </a:r>
             <a:endParaRPr lang="en-US" sz="2100" dirty="0"/>
           </a:p>

--- a/assets/plc/2026-10-27_Lesson_Internalization_Color-Coded_CER_Evidence_to_Feedback_and_Revision.pptx
+++ b/assets/plc/2026-10-27_Lesson_Internalization_Color-Coded_CER_Evidence_to_Feedback_and_Revision.pptx
@@ -1397,7 +1397,7 @@
     <p:bg>
       <p:bgPr>
         <a:solidFill>
-          <a:srgbClr val="202124"/>
+          <a:srgbClr val="FFFFFF"/>
         </a:solidFill>
       </p:bgPr>
     </p:bg>
@@ -1424,7 +1424,27 @@
         <p:spPr>
           <a:xfrm>
             <a:off x="0" y="0"/>
-            <a:ext cx="355600" cy="9144000"/>
+            <a:ext cx="16256000" cy="1168400"/>
+          </a:xfrm>
+          <a:prstGeom prst="rect">
+            <a:avLst/>
+          </a:prstGeom>
+          <a:solidFill>
+            <a:srgbClr val="202124"/>
+          </a:solidFill>
+          <a:ln/>
+        </p:spPr>
+      </p:sp>
+      <p:sp>
+        <p:nvSpPr>
+          <p:cNvPr id="3" name="cover-shape-2"/>
+          <p:cNvSpPr/>
+          <p:nvPr/>
+        </p:nvSpPr>
+        <p:spPr>
+          <a:xfrm>
+            <a:off x="0" y="1168400"/>
+            <a:ext cx="16256000" cy="101600"/>
           </a:xfrm>
           <a:prstGeom prst="rect">
             <a:avLst/>
@@ -1437,34 +1457,14 @@
       </p:sp>
       <p:sp>
         <p:nvSpPr>
-          <p:cNvPr id="3" name="cover-shape-2"/>
-          <p:cNvSpPr/>
-          <p:nvPr/>
-        </p:nvSpPr>
-        <p:spPr>
-          <a:xfrm>
-            <a:off x="889000" y="1168400"/>
-            <a:ext cx="1905000" cy="101600"/>
-          </a:xfrm>
-          <a:prstGeom prst="rect">
-            <a:avLst/>
-          </a:prstGeom>
-          <a:solidFill>
-            <a:srgbClr val="C41220"/>
-          </a:solidFill>
-          <a:ln/>
-        </p:spPr>
-      </p:sp>
-      <p:sp>
-        <p:nvSpPr>
-          <p:cNvPr id="4" name="cover-kicker"/>
-          <p:cNvSpPr/>
-          <p:nvPr/>
-        </p:nvSpPr>
-        <p:spPr>
-          <a:xfrm>
-            <a:off x="889000" y="1600200"/>
-            <a:ext cx="12065000" cy="355600"/>
+          <p:cNvPr id="4" name="kicker"/>
+          <p:cNvSpPr/>
+          <p:nvPr/>
+        </p:nvSpPr>
+        <p:spPr>
+          <a:xfrm>
+            <a:off x="736600" y="381000"/>
+            <a:ext cx="11430000" cy="279400"/>
           </a:xfrm>
           <a:prstGeom prst="rect">
             <a:avLst/>
@@ -1480,9 +1480,9 @@
               <a:buNone/>
             </a:pPr>
             <a:r>
-              <a:rPr lang="en-US" altLang="en-US" sz="1700" dirty="0">
-                <a:solidFill>
-                  <a:srgbClr val="D1D5DB"/>
+              <a:rPr lang="en-US" altLang="en-US" sz="1600" dirty="0">
+                <a:solidFill>
+                  <a:srgbClr val="F1F3F4"/>
                 </a:solidFill>
                 <a:latin typeface="Inter" pitchFamily="34" charset="0"/>
                 <a:ea typeface="Inter" pitchFamily="34" charset="-122"/>
@@ -1490,20 +1490,20 @@
               </a:rPr>
               <a:t>SCIENCE DEPARTMENT PLC  •  TUESDAY, OCTOBER 27, 2026  •  41 MINUTES</a:t>
             </a:r>
-            <a:endParaRPr lang="en-US" sz="1700" dirty="0"/>
-          </a:p>
-        </p:txBody>
-      </p:sp>
-      <p:sp>
-        <p:nvSpPr>
-          <p:cNvPr id="5" name="cover-title"/>
-          <p:cNvSpPr/>
-          <p:nvPr/>
-        </p:nvSpPr>
-        <p:spPr>
-          <a:xfrm>
-            <a:off x="889000" y="2387600"/>
-            <a:ext cx="12954000" cy="1625600"/>
+            <a:endParaRPr lang="en-US" sz="1600" dirty="0"/>
+          </a:p>
+        </p:txBody>
+      </p:sp>
+      <p:sp>
+        <p:nvSpPr>
+          <p:cNvPr id="5" name="title"/>
+          <p:cNvSpPr/>
+          <p:nvPr/>
+        </p:nvSpPr>
+        <p:spPr>
+          <a:xfrm>
+            <a:off x="736600" y="1917700"/>
+            <a:ext cx="11811000" cy="1473200"/>
           </a:xfrm>
           <a:prstGeom prst="rect">
             <a:avLst/>
@@ -1519,62 +1519,107 @@
           <a:p>
             <a:pPr algn="l" indent="0" marL="0">
               <a:lnSpc>
-                <a:spcPts val="4860"/>
+                <a:spcPts val="4752"/>
               </a:lnSpc>
               <a:buNone/>
             </a:pPr>
             <a:r>
-              <a:rPr lang="en-US" altLang="en-US" sz="4500" dirty="0">
-                <a:solidFill>
-                  <a:srgbClr val="FFFFFF"/>
-                </a:solidFill>
-                <a:latin typeface="Inter" pitchFamily="34" charset="0"/>
-                <a:ea typeface="Inter" pitchFamily="34" charset="-122"/>
-                <a:cs typeface="Inter" pitchFamily="34" charset="-120"/>
-              </a:rPr>
-              <a:t>Refine Feedback + Revision</a:t>
-            </a:r>
-            <a:endParaRPr lang="en-US" sz="4500" dirty="0"/>
+              <a:rPr lang="en-US" altLang="en-US" sz="4400" dirty="0">
+                <a:solidFill>
+                  <a:srgbClr val="202124"/>
+                </a:solidFill>
+                <a:latin typeface="Inter" pitchFamily="34" charset="0"/>
+                <a:ea typeface="Inter" pitchFamily="34" charset="-122"/>
+                <a:cs typeface="Inter" pitchFamily="34" charset="-120"/>
+              </a:rPr>
+              <a:t>From Benchmark Reflection</a:t>
+            </a:r>
+            <a:endParaRPr lang="en-US" sz="4400" dirty="0"/>
           </a:p>
           <a:p>
             <a:pPr algn="l" indent="0" marL="0">
               <a:lnSpc>
-                <a:spcPts val="4860"/>
+                <a:spcPts val="4752"/>
               </a:lnSpc>
               <a:buNone/>
             </a:pPr>
             <a:r>
-              <a:rPr lang="en-US" altLang="en-US" sz="4500" dirty="0">
-                <a:solidFill>
-                  <a:srgbClr val="FFFFFF"/>
-                </a:solidFill>
-                <a:latin typeface="Inter" pitchFamily="34" charset="0"/>
-                <a:ea typeface="Inter" pitchFamily="34" charset="-122"/>
-                <a:cs typeface="Inter" pitchFamily="34" charset="-120"/>
-              </a:rPr>
-              <a:t>for the Same Writing Benchmark</a:t>
-            </a:r>
-            <a:endParaRPr lang="en-US" sz="4500" dirty="0"/>
-          </a:p>
-        </p:txBody>
-      </p:sp>
-      <p:sp>
-        <p:nvSpPr>
-          <p:cNvPr id="6" name="cover-shape-5"/>
-          <p:cNvSpPr/>
-          <p:nvPr/>
-        </p:nvSpPr>
-        <p:spPr>
-          <a:xfrm>
-            <a:off x="889000" y="4597400"/>
-            <a:ext cx="12954000" cy="9144"/>
-          </a:xfrm>
-          <a:prstGeom prst="line">
-            <a:avLst/>
-          </a:prstGeom>
-          <a:ln w="12700">
+              <a:rPr lang="en-US" altLang="en-US" sz="4400" dirty="0">
+                <a:solidFill>
+                  <a:srgbClr val="202124"/>
+                </a:solidFill>
+                <a:latin typeface="Inter" pitchFamily="34" charset="0"/>
+                <a:ea typeface="Inter" pitchFamily="34" charset="-122"/>
+                <a:cs typeface="Inter" pitchFamily="34" charset="-120"/>
+              </a:rPr>
+              <a:t>to Lesson Planning for Learning</a:t>
+            </a:r>
+            <a:endParaRPr lang="en-US" sz="4400" dirty="0"/>
+          </a:p>
+        </p:txBody>
+      </p:sp>
+      <p:sp>
+        <p:nvSpPr>
+          <p:cNvPr id="6" name="subtitle"/>
+          <p:cNvSpPr/>
+          <p:nvPr/>
+        </p:nvSpPr>
+        <p:spPr>
+          <a:xfrm>
+            <a:off x="736600" y="3797300"/>
+            <a:ext cx="10820400" cy="1092200"/>
+          </a:xfrm>
+          <a:prstGeom prst="rect">
+            <a:avLst/>
+          </a:prstGeom>
+          <a:noFill/>
+          <a:ln/>
+        </p:spPr>
+        <p:txBody>
+          <a:bodyPr wrap="square" lIns="0" tIns="0" rIns="0" bIns="0" rtlCol="0" anchor="t"/>
+          <a:lstStyle/>
+          <a:p>
+            <a:pPr algn="l" indent="0" marL="0">
+              <a:lnSpc>
+                <a:spcPts val="3050"/>
+              </a:lnSpc>
+              <a:buNone/>
+            </a:pPr>
+            <a:r>
+              <a:rPr lang="en-US" altLang="en-US" sz="2500" dirty="0">
+                <a:solidFill>
+                  <a:srgbClr val="3C4043"/>
+                </a:solidFill>
+                <a:latin typeface="Inter" pitchFamily="34" charset="0"/>
+                <a:ea typeface="Inter" pitchFamily="34" charset="-122"/>
+                <a:cs typeface="Inter" pitchFamily="34" charset="-120"/>
+              </a:rPr>
+              <a:t>Use Monday’s task analysis, completed response, anticipated student mistakes, and questions to plan learning, access, facilitation, written feedback, and revision.</a:t>
+            </a:r>
+            <a:endParaRPr lang="en-US" sz="2500" dirty="0"/>
+          </a:p>
+        </p:txBody>
+      </p:sp>
+      <p:sp>
+        <p:nvSpPr>
+          <p:cNvPr id="7" name="cover-shape-6"/>
+          <p:cNvSpPr/>
+          <p:nvPr/>
+        </p:nvSpPr>
+        <p:spPr>
+          <a:xfrm>
+            <a:off x="12242800" y="2057400"/>
+            <a:ext cx="3200400" cy="2984500"/>
+          </a:xfrm>
+          <a:prstGeom prst="rect">
+            <a:avLst/>
+          </a:prstGeom>
+          <a:solidFill>
+            <a:srgbClr val="FCE8EA"/>
+          </a:solidFill>
+          <a:ln w="25400">
             <a:solidFill>
-              <a:srgbClr val="72777D"/>
+              <a:srgbClr val="C41220"/>
             </a:solidFill>
             <a:prstDash val="solid"/>
           </a:ln>
@@ -1582,14 +1627,120 @@
       </p:sp>
       <p:sp>
         <p:nvSpPr>
-          <p:cNvPr id="7" name="cover-subtitle"/>
-          <p:cNvSpPr/>
-          <p:nvPr/>
-        </p:nvSpPr>
-        <p:spPr>
-          <a:xfrm>
-            <a:off x="889000" y="5016500"/>
-            <a:ext cx="10668000" cy="939800"/>
+          <p:cNvPr id="8" name="outcome-label"/>
+          <p:cNvSpPr/>
+          <p:nvPr/>
+        </p:nvSpPr>
+        <p:spPr>
+          <a:xfrm>
+            <a:off x="12573000" y="2438400"/>
+            <a:ext cx="2540000" cy="254000"/>
+          </a:xfrm>
+          <a:prstGeom prst="rect">
+            <a:avLst/>
+          </a:prstGeom>
+          <a:noFill/>
+          <a:ln/>
+        </p:spPr>
+        <p:txBody>
+          <a:bodyPr wrap="square" lIns="0" tIns="0" rIns="0" bIns="0" rtlCol="0" anchor="t"/>
+          <a:lstStyle/>
+          <a:p>
+            <a:pPr algn="ctr" indent="0" marL="0">
+              <a:buNone/>
+            </a:pPr>
+            <a:r>
+              <a:rPr lang="en-US" altLang="en-US" sz="1400" dirty="0">
+                <a:solidFill>
+                  <a:srgbClr val="C41220"/>
+                </a:solidFill>
+                <a:latin typeface="Inter" pitchFamily="34" charset="0"/>
+                <a:ea typeface="Inter" pitchFamily="34" charset="-122"/>
+                <a:cs typeface="Inter" pitchFamily="34" charset="-120"/>
+              </a:rPr>
+              <a:t>TODAY’S OUTCOME</a:t>
+            </a:r>
+            <a:endParaRPr lang="en-US" sz="1400" dirty="0"/>
+          </a:p>
+        </p:txBody>
+      </p:sp>
+      <p:sp>
+        <p:nvSpPr>
+          <p:cNvPr id="9" name="outcome"/>
+          <p:cNvSpPr/>
+          <p:nvPr/>
+        </p:nvSpPr>
+        <p:spPr>
+          <a:xfrm>
+            <a:off x="12547600" y="3035300"/>
+            <a:ext cx="2590800" cy="1358900"/>
+          </a:xfrm>
+          <a:prstGeom prst="rect">
+            <a:avLst/>
+          </a:prstGeom>
+          <a:noFill/>
+          <a:ln/>
+        </p:spPr>
+        <p:txBody>
+          <a:bodyPr wrap="square" lIns="0" tIns="0" rIns="0" bIns="0" rtlCol="0" anchor="ctr"/>
+          <a:lstStyle/>
+          <a:p>
+            <a:pPr algn="ctr" indent="0" marL="0">
+              <a:lnSpc>
+                <a:spcPts val="2400"/>
+              </a:lnSpc>
+              <a:buNone/>
+            </a:pPr>
+            <a:r>
+              <a:rPr lang="en-US" altLang="en-US" sz="2000" dirty="0">
+                <a:solidFill>
+                  <a:srgbClr val="3C4043"/>
+                </a:solidFill>
+                <a:latin typeface="Inter" pitchFamily="34" charset="0"/>
+                <a:ea typeface="Inter" pitchFamily="34" charset="-122"/>
+                <a:cs typeface="Inter" pitchFamily="34" charset="-120"/>
+              </a:rPr>
+              <a:t>A lesson plan with a clear mastery bar, access supports, feedback, and a revision step.</a:t>
+            </a:r>
+            <a:endParaRPr lang="en-US" sz="2000" dirty="0"/>
+          </a:p>
+        </p:txBody>
+      </p:sp>
+      <p:sp>
+        <p:nvSpPr>
+          <p:cNvPr id="10" name="cover-shape-9"/>
+          <p:cNvSpPr/>
+          <p:nvPr/>
+        </p:nvSpPr>
+        <p:spPr>
+          <a:xfrm>
+            <a:off x="736600" y="5842000"/>
+            <a:ext cx="14706600" cy="1422400"/>
+          </a:xfrm>
+          <a:prstGeom prst="rect">
+            <a:avLst/>
+          </a:prstGeom>
+          <a:solidFill>
+            <a:srgbClr val="F3F4F6"/>
+          </a:solidFill>
+          <a:ln w="12700">
+            <a:solidFill>
+              <a:srgbClr val="D1D5DB"/>
+            </a:solidFill>
+            <a:prstDash val="solid"/>
+          </a:ln>
+        </p:spPr>
+      </p:sp>
+      <p:sp>
+        <p:nvSpPr>
+          <p:cNvPr id="11" name="anchor"/>
+          <p:cNvSpPr/>
+          <p:nvPr/>
+        </p:nvSpPr>
+        <p:spPr>
+          <a:xfrm>
+            <a:off x="1117600" y="6172200"/>
+            <a:ext cx="13919200" cy="787400"/>
           </a:xfrm>
           <a:prstGeom prst="rect">
             <a:avLst/>
@@ -1603,79 +1754,120 @@
           <a:p>
             <a:pPr algn="l" indent="0" marL="0">
               <a:lnSpc>
-                <a:spcPts val="2950"/>
+                <a:spcPts val="2684"/>
               </a:lnSpc>
               <a:buNone/>
             </a:pPr>
             <a:r>
-              <a:rPr lang="en-US" altLang="en-US" sz="2500" dirty="0">
-                <a:solidFill>
-                  <a:srgbClr val="F1F3F4"/>
-                </a:solidFill>
-                <a:latin typeface="Inter" pitchFamily="34" charset="0"/>
-                <a:ea typeface="Inter" pitchFamily="34" charset="-122"/>
-                <a:cs typeface="Inter" pitchFamily="34" charset="-120"/>
-              </a:rPr>
-              <a:t>Turn Monday’s anticipated student need into one criterion-based prompt, one explicit student action, and one evidence look-for.</a:t>
-            </a:r>
-            <a:endParaRPr lang="en-US" sz="2500" dirty="0"/>
-          </a:p>
-        </p:txBody>
-      </p:sp>
-      <p:sp>
-        <p:nvSpPr>
-          <p:cNvPr id="8" name="cover-shape-7"/>
-          <p:cNvSpPr/>
-          <p:nvPr/>
-        </p:nvSpPr>
-        <p:spPr>
-          <a:xfrm>
-            <a:off x="11912600" y="5308600"/>
-            <a:ext cx="3098800" cy="1727200"/>
-          </a:xfrm>
-          <a:prstGeom prst="rect">
-            <a:avLst/>
-          </a:prstGeom>
-          <a:solidFill>
-            <a:srgbClr val="C41220"/>
-          </a:solidFill>
-          <a:ln/>
-        </p:spPr>
-      </p:sp>
-      <p:sp>
-        <p:nvSpPr>
-          <p:cNvPr id="9" name="cover-outcome-label"/>
-          <p:cNvSpPr/>
-          <p:nvPr/>
-        </p:nvSpPr>
-        <p:spPr>
-          <a:xfrm>
-            <a:off x="12166600" y="5588000"/>
-            <a:ext cx="2590800" cy="228600"/>
-          </a:xfrm>
-          <a:prstGeom prst="rect">
-            <a:avLst/>
-          </a:prstGeom>
-          <a:noFill/>
-          <a:ln/>
-        </p:spPr>
-        <p:txBody>
-          <a:bodyPr wrap="none" lIns="0" tIns="0" rIns="0" bIns="0" rtlCol="0" anchor="t"/>
-          <a:lstStyle/>
-          <a:p>
-            <a:pPr algn="ctr" indent="0" marL="0">
+              <a:rPr lang="en-US" altLang="en-US" sz="2200" b="1" dirty="0">
+                <a:solidFill>
+                  <a:srgbClr val="C41220"/>
+                </a:solidFill>
+                <a:latin typeface="Inter" pitchFamily="34" charset="0"/>
+                <a:ea typeface="Inter" pitchFamily="34" charset="-122"/>
+                <a:cs typeface="Inter" pitchFamily="34" charset="-120"/>
+              </a:rPr>
+              <a:t>Keep the standard visible:</a:t>
+            </a:r>
+            <a:r>
+              <a:rPr lang="en-US" altLang="en-US" sz="2200" dirty="0">
+                <a:solidFill>
+                  <a:srgbClr val="3C4043"/>
+                </a:solidFill>
+                <a:latin typeface="Inter" pitchFamily="34" charset="0"/>
+                <a:ea typeface="Inter" pitchFamily="34" charset="-122"/>
+                <a:cs typeface="Inter" pitchFamily="34" charset="-120"/>
+              </a:rPr>
+              <a:t> use the Biology benchmark as the shared model, then apply the same planning moves to the appropriate task in each science course.</a:t>
+            </a:r>
+            <a:endParaRPr lang="en-US" sz="2200" dirty="0"/>
+          </a:p>
+        </p:txBody>
+      </p:sp>
+      <p:sp>
+        <p:nvSpPr>
+          <p:cNvPr id="12" name="footer"/>
+          <p:cNvSpPr/>
+          <p:nvPr/>
+        </p:nvSpPr>
+        <p:spPr>
+          <a:xfrm>
+            <a:off x="736600" y="7975600"/>
+            <a:ext cx="12827000" cy="431800"/>
+          </a:xfrm>
+          <a:prstGeom prst="rect">
+            <a:avLst/>
+          </a:prstGeom>
+          <a:noFill/>
+          <a:ln/>
+        </p:spPr>
+        <p:txBody>
+          <a:bodyPr wrap="square" lIns="0" tIns="0" rIns="0" bIns="0" rtlCol="0" anchor="t"/>
+          <a:lstStyle/>
+          <a:p>
+            <a:pPr algn="l" indent="0" marL="0">
+              <a:buNone/>
+            </a:pPr>
+            <a:r>
+              <a:rPr lang="en-US" altLang="en-US" sz="2100" b="1" dirty="0">
+                <a:solidFill>
+                  <a:srgbClr val="C41220"/>
+                </a:solidFill>
+                <a:latin typeface="Inter" pitchFamily="34" charset="0"/>
+                <a:ea typeface="Inter" pitchFamily="34" charset="-122"/>
+                <a:cs typeface="Inter" pitchFamily="34" charset="-120"/>
+              </a:rPr>
+              <a:t>Lesson Internalization Tool:</a:t>
+            </a:r>
+            <a:r>
+              <a:rPr lang="en-US" altLang="en-US" sz="2100" dirty="0">
+                <a:solidFill>
+                  <a:srgbClr val="3C4043"/>
+                </a:solidFill>
+                <a:latin typeface="Inter" pitchFamily="34" charset="0"/>
+                <a:ea typeface="Inter" pitchFamily="34" charset="-122"/>
+                <a:cs typeface="Inter" pitchFamily="34" charset="-120"/>
+              </a:rPr>
+              <a:t> Every Day Questions 1, 3, and 4; Team Deep Dive Steps 2–4.</a:t>
+            </a:r>
+            <a:endParaRPr lang="en-US" sz="2100" dirty="0"/>
+          </a:p>
+        </p:txBody>
+      </p:sp>
+      <p:sp>
+        <p:nvSpPr>
+          <p:cNvPr id="13" name="page"/>
+          <p:cNvSpPr/>
+          <p:nvPr/>
+        </p:nvSpPr>
+        <p:spPr>
+          <a:xfrm>
+            <a:off x="14732000" y="8432800"/>
+            <a:ext cx="736600" cy="228600"/>
+          </a:xfrm>
+          <a:prstGeom prst="rect">
+            <a:avLst/>
+          </a:prstGeom>
+          <a:noFill/>
+          <a:ln/>
+        </p:spPr>
+        <p:txBody>
+          <a:bodyPr wrap="square" lIns="0" tIns="0" rIns="0" bIns="0" rtlCol="0" anchor="t"/>
+          <a:lstStyle/>
+          <a:p>
+            <a:pPr algn="r" indent="0" marL="0">
               <a:buNone/>
             </a:pPr>
             <a:r>
               <a:rPr lang="en-US" altLang="en-US" sz="1300" dirty="0">
                 <a:solidFill>
-                  <a:srgbClr val="FDECEC"/>
-                </a:solidFill>
-                <a:latin typeface="Inter" pitchFamily="34" charset="0"/>
-                <a:ea typeface="Inter" pitchFamily="34" charset="-122"/>
-                <a:cs typeface="Inter" pitchFamily="34" charset="-120"/>
-              </a:rPr>
-              <a:t>TODAY’S OUTCOME</a:t>
+                  <a:srgbClr val="6B7280"/>
+                </a:solidFill>
+                <a:latin typeface="Inter" pitchFamily="34" charset="0"/>
+                <a:ea typeface="Inter" pitchFamily="34" charset="-122"/>
+                <a:cs typeface="Inter" pitchFamily="34" charset="-120"/>
+              </a:rPr>
+              <a:t>01</a:t>
             </a:r>
             <a:endParaRPr lang="en-US" sz="1300" dirty="0"/>
           </a:p>
@@ -1683,141 +1875,7 @@
       </p:sp>
       <p:sp>
         <p:nvSpPr>
-          <p:cNvPr id="10" name="cover-outcome"/>
-          <p:cNvSpPr/>
-          <p:nvPr/>
-        </p:nvSpPr>
-        <p:spPr>
-          <a:xfrm>
-            <a:off x="12141200" y="5969000"/>
-            <a:ext cx="2641600" cy="762000"/>
-          </a:xfrm>
-          <a:prstGeom prst="rect">
-            <a:avLst/>
-          </a:prstGeom>
-          <a:noFill/>
-          <a:ln/>
-        </p:spPr>
-        <p:txBody>
-          <a:bodyPr wrap="square" lIns="0" tIns="0" rIns="0" bIns="0" rtlCol="0" anchor="t"/>
-          <a:lstStyle/>
-          <a:p>
-            <a:pPr algn="ctr" indent="0" marL="0">
-              <a:lnSpc>
-                <a:spcPts val="1972"/>
-              </a:lnSpc>
-              <a:buNone/>
-            </a:pPr>
-            <a:r>
-              <a:rPr lang="en-US" altLang="en-US" sz="1700" dirty="0">
-                <a:solidFill>
-                  <a:srgbClr val="FFFFFF"/>
-                </a:solidFill>
-                <a:latin typeface="Inter" pitchFamily="34" charset="0"/>
-                <a:ea typeface="Inter" pitchFamily="34" charset="-122"/>
-                <a:cs typeface="Inter" pitchFamily="34" charset="-120"/>
-              </a:rPr>
-              <a:t>One criterion, one feedback prompt, one student action, and one evidence look-for.</a:t>
-            </a:r>
-            <a:endParaRPr lang="en-US" sz="1700" dirty="0"/>
-          </a:p>
-        </p:txBody>
-      </p:sp>
-      <p:sp>
-        <p:nvSpPr>
-          <p:cNvPr id="11" name="cover-footer"/>
-          <p:cNvSpPr/>
-          <p:nvPr/>
-        </p:nvSpPr>
-        <p:spPr>
-          <a:xfrm>
-            <a:off x="889000" y="7493000"/>
-            <a:ext cx="12446000" cy="533400"/>
-          </a:xfrm>
-          <a:prstGeom prst="rect">
-            <a:avLst/>
-          </a:prstGeom>
-          <a:noFill/>
-          <a:ln/>
-        </p:spPr>
-        <p:txBody>
-          <a:bodyPr wrap="square" lIns="0" tIns="0" rIns="0" bIns="0" rtlCol="0" anchor="t"/>
-          <a:lstStyle/>
-          <a:p>
-            <a:pPr algn="l" indent="0" marL="0">
-              <a:lnSpc>
-                <a:spcPts val="2596"/>
-              </a:lnSpc>
-              <a:buNone/>
-            </a:pPr>
-            <a:r>
-              <a:rPr lang="en-US" altLang="en-US" sz="2200" b="1" dirty="0">
-                <a:solidFill>
-                  <a:srgbClr val="F6B4BA"/>
-                </a:solidFill>
-                <a:latin typeface="Inter" pitchFamily="34" charset="0"/>
-                <a:ea typeface="Inter" pitchFamily="34" charset="-122"/>
-                <a:cs typeface="Inter" pitchFamily="34" charset="-120"/>
-              </a:rPr>
-              <a:t>Lesson Internalization Tool:</a:t>
-            </a:r>
-            <a:r>
-              <a:rPr lang="en-US" altLang="en-US" sz="2200" dirty="0">
-                <a:solidFill>
-                  <a:srgbClr val="D1D5DB"/>
-                </a:solidFill>
-                <a:latin typeface="Inter" pitchFamily="34" charset="0"/>
-                <a:ea typeface="Inter" pitchFamily="34" charset="-122"/>
-                <a:cs typeface="Inter" pitchFamily="34" charset="-120"/>
-              </a:rPr>
-              <a:t> Every Day Questions 3 and 4; Team Deep Dive Steps 3–5.</a:t>
-            </a:r>
-            <a:endParaRPr lang="en-US" sz="2200" dirty="0"/>
-          </a:p>
-        </p:txBody>
-      </p:sp>
-      <p:sp>
-        <p:nvSpPr>
-          <p:cNvPr id="12" name="page"/>
-          <p:cNvSpPr/>
-          <p:nvPr/>
-        </p:nvSpPr>
-        <p:spPr>
-          <a:xfrm>
-            <a:off x="14478000" y="8407400"/>
-            <a:ext cx="762000" cy="228600"/>
-          </a:xfrm>
-          <a:prstGeom prst="rect">
-            <a:avLst/>
-          </a:prstGeom>
-          <a:noFill/>
-          <a:ln/>
-        </p:spPr>
-        <p:txBody>
-          <a:bodyPr wrap="square" lIns="0" tIns="0" rIns="0" bIns="0" rtlCol="0" anchor="t"/>
-          <a:lstStyle/>
-          <a:p>
-            <a:pPr algn="r" indent="0" marL="0">
-              <a:buNone/>
-            </a:pPr>
-            <a:r>
-              <a:rPr lang="en-US" altLang="en-US" sz="1300" dirty="0">
-                <a:solidFill>
-                  <a:srgbClr val="D1D5DB"/>
-                </a:solidFill>
-                <a:latin typeface="Inter" pitchFamily="34" charset="0"/>
-                <a:ea typeface="Inter" pitchFamily="34" charset="-122"/>
-                <a:cs typeface="Inter" pitchFamily="34" charset="-120"/>
-              </a:rPr>
-              <a:t>01</a:t>
-            </a:r>
-            <a:endParaRPr lang="en-US" sz="1300" dirty="0"/>
-          </a:p>
-        </p:txBody>
-      </p:sp>
-      <p:sp>
-        <p:nvSpPr>
-          <p:cNvPr id="13" name="cover-shape-12"/>
+          <p:cNvPr id="14" name="cover-shape-13"/>
           <p:cNvSpPr/>
           <p:nvPr/>
         </p:nvSpPr>
@@ -1920,7 +1978,7 @@
                 <a:ea typeface="Inter" pitchFamily="34" charset="-122"/>
                 <a:cs typeface="Inter" pitchFamily="34" charset="-120"/>
               </a:rPr>
-              <a:t>Carry Forward the Same Writing Benchmark</a:t>
+              <a:t>Start With What Monday Revealed</a:t>
             </a:r>
             <a:endParaRPr lang="en-US" sz="3000" dirty="0"/>
           </a:p>
@@ -1987,6 +2045,9 @@
           <a:lstStyle/>
           <a:p>
             <a:pPr algn="l" indent="0" marL="0">
+              <a:lnSpc>
+                <a:spcPts val="2760"/>
+              </a:lnSpc>
               <a:buNone/>
             </a:pPr>
             <a:r>
@@ -1998,7 +2059,7 @@
                 <a:ea typeface="Inter" pitchFamily="34" charset="-122"/>
                 <a:cs typeface="Inter" pitchFamily="34" charset="-120"/>
               </a:rPr>
-              <a:t>The priority standard, writing task, source/evidence, and criterion remain the same. Today sharpens the response students will make after feedback.</a:t>
+              <a:t>Monday gave teams a learner’s view of the benchmark. Today turns that experience into instructional decisions before students complete their own task.</a:t>
             </a:r>
             <a:endParaRPr lang="en-US" sz="2300" dirty="0"/>
           </a:p>
@@ -2088,7 +2149,7 @@
                 <a:ea typeface="Inter" pitchFamily="34" charset="-122"/>
                 <a:cs typeface="Inter" pitchFamily="34" charset="-120"/>
               </a:rPr>
-              <a:t>Internalize task</a:t>
+              <a:t>Experience task</a:t>
             </a:r>
             <a:endParaRPr lang="en-US" sz="2000" dirty="0"/>
           </a:p>
@@ -2111,7 +2172,7 @@
                 <a:ea typeface="Inter" pitchFamily="34" charset="-122"/>
                 <a:cs typeface="Inter" pitchFamily="34" charset="-120"/>
               </a:rPr>
-              <a:t>Benchmark, criteria, source, anticipated thinking, and feedback idea.</a:t>
+              <a:t>Completed benchmark, task/text analysis, CUBS, color-coded CER.</a:t>
             </a:r>
             <a:endParaRPr lang="en-US" sz="2000" dirty="0"/>
           </a:p>
@@ -2217,7 +2278,7 @@
                 <a:ea typeface="Inter" pitchFamily="34" charset="-122"/>
                 <a:cs typeface="Inter" pitchFamily="34" charset="-120"/>
               </a:rPr>
-              <a:t>TODAY</a:t>
+              <a:t>NOTICE</a:t>
             </a:r>
             <a:endParaRPr lang="en-US" sz="2000" dirty="0"/>
           </a:p>
@@ -2240,7 +2301,7 @@
                 <a:ea typeface="Inter" pitchFamily="34" charset="-122"/>
                 <a:cs typeface="Inter" pitchFamily="34" charset="-120"/>
               </a:rPr>
-              <a:t>Feedback + action</a:t>
+              <a:t>Anticipated response</a:t>
             </a:r>
             <a:endParaRPr lang="en-US" sz="2000" dirty="0"/>
           </a:p>
@@ -2263,7 +2324,7 @@
                 <a:ea typeface="Inter" pitchFamily="34" charset="-122"/>
                 <a:cs typeface="Inter" pitchFamily="34" charset="-120"/>
               </a:rPr>
-              <a:t>One criterion, a prompt, a student move, and revised evidence.</a:t>
+              <a:t>Likely claims, evidence, reasoning, questions, and mistakes.</a:t>
             </a:r>
             <a:endParaRPr lang="en-US" sz="2000" dirty="0"/>
           </a:p>
@@ -2323,7 +2384,7 @@
             <a:avLst/>
           </a:prstGeom>
           <a:solidFill>
-            <a:srgbClr val="F3F4F6"/>
+            <a:srgbClr val="F8F9FA"/>
           </a:solidFill>
           <a:ln w="12700">
             <a:solidFill>
@@ -2369,7 +2430,7 @@
                 <a:ea typeface="Inter" pitchFamily="34" charset="-122"/>
                 <a:cs typeface="Inter" pitchFamily="34" charset="-120"/>
               </a:rPr>
-              <a:t>WEDNESDAY PD</a:t>
+              <a:t>TODAY</a:t>
             </a:r>
             <a:endParaRPr lang="en-US" sz="2000" dirty="0"/>
           </a:p>
@@ -2392,7 +2453,7 @@
                 <a:ea typeface="Inter" pitchFamily="34" charset="-122"/>
                 <a:cs typeface="Inter" pitchFamily="34" charset="-120"/>
               </a:rPr>
-              <a:t>Calibrate the bar</a:t>
+              <a:t>Plan learning</a:t>
             </a:r>
             <a:endParaRPr lang="en-US" sz="2000" dirty="0"/>
           </a:p>
@@ -2415,7 +2476,7 @@
                 <a:ea typeface="Inter" pitchFamily="34" charset="-122"/>
                 <a:cs typeface="Inter" pitchFamily="34" charset="-120"/>
               </a:rPr>
-              <a:t>Use a small sample or anticipated response to compare expectations.</a:t>
+              <a:t>Lesson arc, access, facilitation, written feedback, and revision.</a:t>
             </a:r>
             <a:endParaRPr lang="en-US" sz="2000" dirty="0"/>
           </a:p>
@@ -2516,7 +2577,7 @@
                 <a:ea typeface="Inter" pitchFamily="34" charset="-122"/>
                 <a:cs typeface="Inter" pitchFamily="34" charset="-120"/>
               </a:rPr>
-              <a:t>FRIDAY</a:t>
+              <a:t>TEACH + COLLECT</a:t>
             </a:r>
             <a:endParaRPr lang="en-US" sz="2000" dirty="0"/>
           </a:p>
@@ -2539,7 +2600,7 @@
                 <a:ea typeface="Inter" pitchFamily="34" charset="-122"/>
                 <a:cs typeface="Inter" pitchFamily="34" charset="-120"/>
               </a:rPr>
-              <a:t>Review evidence</a:t>
+              <a:t>Prepare Friday evidence</a:t>
             </a:r>
             <a:endParaRPr lang="en-US" sz="2000" dirty="0"/>
           </a:p>
@@ -2562,7 +2623,7 @@
                 <a:ea typeface="Inter" pitchFamily="34" charset="-122"/>
                 <a:cs typeface="Inter" pitchFamily="34" charset="-120"/>
               </a:rPr>
-              <a:t>Writing samples and unit-test evidence where available inform the next lesson.</a:t>
+              <a:t>Completed student writing and feedback will guide the next step.</a:t>
             </a:r>
             <a:endParaRPr lang="en-US" sz="2000" dirty="0"/>
           </a:p>
@@ -2632,7 +2693,7 @@
                 <a:ea typeface="Inter" pitchFamily="34" charset="-122"/>
                 <a:cs typeface="Inter" pitchFamily="34" charset="-120"/>
               </a:rPr>
-              <a:t> Feedback is useful only when it leads students to take an observable next step in the same science task.</a:t>
+              <a:t> Teacher reflection is evidence for planning; it does not predict or label individual students.</a:t>
             </a:r>
             <a:endParaRPr lang="en-US" sz="2100" dirty="0"/>
           </a:p>
@@ -2782,7 +2843,7 @@
                 <a:ea typeface="Inter" pitchFamily="34" charset="-122"/>
                 <a:cs typeface="Inter" pitchFamily="34" charset="-120"/>
               </a:rPr>
-              <a:t>Select One High-Leverage Feedback Need</a:t>
+              <a:t>Plan the Learning Arc Toward Standard Mastery</a:t>
             </a:r>
             <a:endParaRPr lang="en-US" sz="3000" dirty="0"/>
           </a:p>
@@ -2836,7 +2897,7 @@
         <p:spPr>
           <a:xfrm>
             <a:off x="508000" y="1397000"/>
-            <a:ext cx="13716000" cy="635000"/>
+            <a:ext cx="14351000" cy="635000"/>
           </a:xfrm>
           <a:prstGeom prst="rect">
             <a:avLst/>
@@ -2860,7 +2921,7 @@
                 <a:ea typeface="Inter" pitchFamily="34" charset="-122"/>
                 <a:cs typeface="Inter" pitchFamily="34" charset="-120"/>
               </a:rPr>
-              <a:t>Use Monday’s anticipated response or early student evidence to choose one criterion students can act on now. Do not try to address every need.</a:t>
+              <a:t>Use Monday’s reflection to make the learning goal and mastery bar visible before selecting supports. Start with the science thinking—not a list of activities.</a:t>
             </a:r>
             <a:endParaRPr lang="en-US" sz="2300" dirty="0"/>
           </a:p>
@@ -2924,7 +2985,7 @@
                 <a:ea typeface="Inter" pitchFamily="34" charset="-122"/>
                 <a:cs typeface="Inter" pitchFamily="34" charset="-120"/>
               </a:rPr>
-              <a:t>NOTICE THE EVIDENCE</a:t>
+              <a:t>1. NAME THE TARGET</a:t>
             </a:r>
             <a:endParaRPr lang="en-US" sz="2500" dirty="0"/>
           </a:p>
@@ -2970,7 +3031,7 @@
                 <a:ea typeface="Inter" pitchFamily="34" charset="-122"/>
                 <a:cs typeface="Inter" pitchFamily="34" charset="-120"/>
               </a:rPr>
-              <a:t>What is already visible?</a:t>
+              <a:t>Priority standard and science idea</a:t>
             </a:r>
             <a:endParaRPr lang="en-US" sz="2100" dirty="0"/>
           </a:p>
@@ -2994,7 +3055,7 @@
                 <a:ea typeface="Inter" pitchFamily="34" charset="-122"/>
                 <a:cs typeface="Inter" pitchFamily="34" charset="-120"/>
               </a:rPr>
-              <a:t>What is partial, missing, or confused?</a:t>
+              <a:t>What students will read, analyze, model, or explain</a:t>
             </a:r>
             <a:endParaRPr lang="en-US" sz="2100" dirty="0"/>
           </a:p>
@@ -3018,7 +3079,7 @@
                 <a:ea typeface="Inter" pitchFamily="34" charset="-122"/>
                 <a:cs typeface="Inter" pitchFamily="34" charset="-120"/>
               </a:rPr>
-              <a:t>What matters most for this task?</a:t>
+              <a:t>What mastery must look like in the product</a:t>
             </a:r>
             <a:endParaRPr lang="en-US" sz="2100" dirty="0"/>
           </a:p>
@@ -3082,7 +3143,7 @@
                 <a:ea typeface="Inter" pitchFamily="34" charset="-122"/>
                 <a:cs typeface="Inter" pitchFamily="34" charset="-120"/>
               </a:rPr>
-              <a:t>CHOOSE ONE CRITERION</a:t>
+              <a:t>2. PLAN THE ARC</a:t>
             </a:r>
             <a:endParaRPr lang="en-US" sz="2500" dirty="0"/>
           </a:p>
@@ -3124,7 +3185,7 @@
                 <a:ea typeface="Inter" pitchFamily="34" charset="-122"/>
                 <a:cs typeface="Inter" pitchFamily="34" charset="-120"/>
               </a:rPr>
-              <a:t>Claim or conclusion</a:t>
+              <a:t>Notice and analyze</a:t>
             </a:r>
             <a:endParaRPr lang="en-US" sz="2100" dirty="0"/>
           </a:p>
@@ -3144,7 +3205,7 @@
                 <a:ea typeface="Inter" pitchFamily="34" charset="-122"/>
                 <a:cs typeface="Inter" pitchFamily="34" charset="-120"/>
               </a:rPr>
-              <a:t>Evidence selection or accuracy</a:t>
+              <a:t>Discuss and test ideas</a:t>
             </a:r>
             <a:endParaRPr lang="en-US" sz="2100" dirty="0"/>
           </a:p>
@@ -3164,7 +3225,7 @@
                 <a:ea typeface="Inter" pitchFamily="34" charset="-122"/>
                 <a:cs typeface="Inter" pitchFamily="34" charset="-120"/>
               </a:rPr>
-              <a:t>Scientific reasoning</a:t>
+              <a:t>Write/construct CER</a:t>
             </a:r>
             <a:endParaRPr lang="en-US" sz="2100" dirty="0"/>
           </a:p>
@@ -3184,7 +3245,7 @@
                 <a:ea typeface="Inter" pitchFamily="34" charset="-122"/>
                 <a:cs typeface="Inter" pitchFamily="34" charset="-120"/>
               </a:rPr>
-              <a:t>Language, transitions, labels</a:t>
+              <a:t>Revise from feedback</a:t>
             </a:r>
             <a:endParaRPr lang="en-US" sz="2100" dirty="0"/>
           </a:p>
@@ -3248,7 +3309,7 @@
                 <a:ea typeface="Inter" pitchFamily="34" charset="-122"/>
                 <a:cs typeface="Inter" pitchFamily="34" charset="-120"/>
               </a:rPr>
-              <a:t>CHECK THE FIT</a:t>
+              <a:t>3. CHECK THE FIT</a:t>
             </a:r>
             <a:endParaRPr lang="en-US" sz="2500" dirty="0"/>
           </a:p>
@@ -3294,7 +3355,7 @@
                 <a:ea typeface="Inter" pitchFamily="34" charset="-122"/>
                 <a:cs typeface="Inter" pitchFamily="34" charset="-120"/>
               </a:rPr>
-              <a:t>Tied to the standard and task?</a:t>
+              <a:t>Does each step build toward the standard?</a:t>
             </a:r>
             <a:endParaRPr lang="en-US" sz="2100" dirty="0"/>
           </a:p>
@@ -3318,7 +3379,7 @@
                 <a:ea typeface="Inter" pitchFamily="34" charset="-122"/>
                 <a:cs typeface="Inter" pitchFamily="34" charset="-120"/>
               </a:rPr>
-              <a:t>Visible in a response?</a:t>
+              <a:t>Will students have time to grapple?</a:t>
             </a:r>
             <a:endParaRPr lang="en-US" sz="2100" dirty="0"/>
           </a:p>
@@ -3342,7 +3403,7 @@
                 <a:ea typeface="Inter" pitchFamily="34" charset="-122"/>
                 <a:cs typeface="Inter" pitchFamily="34" charset="-120"/>
               </a:rPr>
-              <a:t>Possible for students to act on today?</a:t>
+              <a:t>Will the benchmark demand remain visible?</a:t>
             </a:r>
             <a:endParaRPr lang="en-US" sz="2100" dirty="0"/>
           </a:p>
@@ -3401,7 +3462,7 @@
                 <a:ea typeface="Inter" pitchFamily="34" charset="-122"/>
                 <a:cs typeface="Inter" pitchFamily="34" charset="-120"/>
               </a:rPr>
-              <a:t>Decision:</a:t>
+              <a:t>Planning decision:</a:t>
             </a:r>
             <a:r>
               <a:rPr lang="en-US" altLang="en-US" sz="2000" dirty="0">
@@ -3412,7 +3473,7 @@
                 <a:ea typeface="Inter" pitchFamily="34" charset="-122"/>
                 <a:cs typeface="Inter" pitchFamily="34" charset="-120"/>
               </a:rPr>
-              <a:t> “Students need to strengthen ______ so they can ______ in this writing benchmark.”</a:t>
+              <a:t> “Students will ______ so they can demonstrate ______ in the standards-aligned response.”</a:t>
             </a:r>
             <a:endParaRPr lang="en-US" sz="2000" dirty="0"/>
           </a:p>
@@ -3538,7 +3599,7 @@
         <p:spPr>
           <a:xfrm>
             <a:off x="508000" y="292100"/>
-            <a:ext cx="11430000" cy="482600"/>
+            <a:ext cx="11811000" cy="482600"/>
           </a:xfrm>
           <a:prstGeom prst="rect">
             <a:avLst/>
@@ -3562,7 +3623,7 @@
                 <a:ea typeface="Inter" pitchFamily="34" charset="-122"/>
                 <a:cs typeface="Inter" pitchFamily="34" charset="-120"/>
               </a:rPr>
-              <a:t>Write Feedback That Causes a Student Action</a:t>
+              <a:t>Plan Access and Facilitation Without Lowering Rigor</a:t>
             </a:r>
             <a:endParaRPr lang="en-US" sz="3000" dirty="0"/>
           </a:p>
@@ -3616,7 +3677,7 @@
         <p:spPr>
           <a:xfrm>
             <a:off x="508000" y="1397000"/>
-            <a:ext cx="14224000" cy="635000"/>
+            <a:ext cx="14351000" cy="635000"/>
           </a:xfrm>
           <a:prstGeom prst="rect">
             <a:avLst/>
@@ -3640,7 +3701,7 @@
                 <a:ea typeface="Inter" pitchFamily="34" charset="-122"/>
                 <a:cs typeface="Inter" pitchFamily="34" charset="-120"/>
               </a:rPr>
-              <a:t>Feedback should point students to the criterion and ask them to examine, explain, revise, compare, correct, or apply learning. It does not complete the thinking for them.</a:t>
+              <a:t>Use Monday’s anticipated mistakes and questions to plan how students will enter the task, engage with evidence, and explain their thinking—not to simplify the science demand.</a:t>
             </a:r>
             <a:endParaRPr lang="en-US" sz="2300" dirty="0"/>
           </a:p>
@@ -3704,7 +3765,7 @@
                 <a:ea typeface="Inter" pitchFamily="34" charset="-122"/>
                 <a:cs typeface="Inter" pitchFamily="34" charset="-120"/>
               </a:rPr>
-              <a:t>AVOID: ANSWER-GIVING</a:t>
+              <a:t>AVOID: REMOVING THE THINKING</a:t>
             </a:r>
             <a:endParaRPr lang="en-US" sz="2600" dirty="0"/>
           </a:p>
@@ -3733,12 +3794,12 @@
           <a:p>
             <a:pPr algn="l" indent="0" marL="0">
               <a:lnSpc>
-                <a:spcPts val="3000"/>
+                <a:spcPts val="2880"/>
               </a:lnSpc>
               <a:buNone/>
             </a:pPr>
             <a:r>
-              <a:rPr lang="en-US" altLang="en-US" sz="2500" dirty="0">
+              <a:rPr lang="en-US" altLang="en-US" sz="2400" dirty="0">
                 <a:solidFill>
                   <a:srgbClr val="202124"/>
                 </a:solidFill>
@@ -3746,9 +3807,9 @@
                 <a:ea typeface="Inter" pitchFamily="34" charset="-122"/>
                 <a:cs typeface="Inter" pitchFamily="34" charset="-120"/>
               </a:rPr>
-              <a:t>“Add a detail from the data table about the population.”</a:t>
-            </a:r>
-            <a:endParaRPr lang="en-US" sz="2500" dirty="0"/>
+              <a:t>“Here is the answer. Copy this evidence and this explanation.”</a:t>
+            </a:r>
+            <a:endParaRPr lang="en-US" sz="2400" dirty="0"/>
           </a:p>
         </p:txBody>
       </p:sp>
@@ -3785,7 +3846,7 @@
                 <a:ea typeface="Inter" pitchFamily="34" charset="-122"/>
                 <a:cs typeface="Inter" pitchFamily="34" charset="-120"/>
               </a:rPr>
-              <a:t>The instruction may improve the response, but it does not ask the student to evaluate or explain evidence.</a:t>
+              <a:t>The support may finish the task, but it does not build independent analysis, evidence use, or reasoning.</a:t>
             </a:r>
             <a:endParaRPr lang="en-US" sz="2000" dirty="0"/>
           </a:p>
@@ -3849,7 +3910,7 @@
                 <a:ea typeface="Inter" pitchFamily="34" charset="-122"/>
                 <a:cs typeface="Inter" pitchFamily="34" charset="-120"/>
               </a:rPr>
-              <a:t>USE: CRITERION + ACTION</a:t>
+              <a:t>USE: ACCESS + FACILITATION</a:t>
             </a:r>
             <a:endParaRPr lang="en-US" sz="2600" dirty="0"/>
           </a:p>
@@ -3878,12 +3939,12 @@
           <a:p>
             <a:pPr algn="l" indent="0" marL="0">
               <a:lnSpc>
-                <a:spcPts val="2880"/>
+                <a:spcPts val="2760"/>
               </a:lnSpc>
               <a:buNone/>
             </a:pPr>
             <a:r>
-              <a:rPr lang="en-US" altLang="en-US" sz="2400" dirty="0">
+              <a:rPr lang="en-US" altLang="en-US" sz="2300" dirty="0">
                 <a:solidFill>
                   <a:srgbClr val="202124"/>
                 </a:solidFill>
@@ -3891,9 +3952,9 @@
                 <a:ea typeface="Inter" pitchFamily="34" charset="-122"/>
                 <a:cs typeface="Inter" pitchFamily="34" charset="-120"/>
               </a:rPr>
-              <a:t>“Underline the data that best supports your claim. Then add a sentence that explains how the trend supports your explanation.”</a:t>
-            </a:r>
-            <a:endParaRPr lang="en-US" sz="2400" dirty="0"/>
+              <a:t>“Use CUBS to mark the graph and food-web details. Which detail is most relevant to your prediction? Explain your choice to a partner before writing.”</a:t>
+            </a:r>
+            <a:endParaRPr lang="en-US" sz="2300" dirty="0"/>
           </a:p>
         </p:txBody>
       </p:sp>
@@ -3930,7 +3991,7 @@
                 <a:ea typeface="Inter" pitchFamily="34" charset="-122"/>
                 <a:cs typeface="Inter" pitchFamily="34" charset="-120"/>
               </a:rPr>
-              <a:t>The prompt returns students to the evidence and requires a scientific reasoning move.</a:t>
+              <a:t>The support gives students a way into the evidence while preserving the explanation they must construct.</a:t>
             </a:r>
             <a:endParaRPr lang="en-US" sz="2000" dirty="0"/>
           </a:p>
@@ -3989,7 +4050,7 @@
                 <a:ea typeface="Inter" pitchFamily="34" charset="-122"/>
                 <a:cs typeface="Inter" pitchFamily="34" charset="-120"/>
               </a:rPr>
-              <a:t>Formula:</a:t>
+              <a:t>Plan:</a:t>
             </a:r>
             <a:r>
               <a:rPr lang="en-US" altLang="en-US" sz="2000" dirty="0">
@@ -4000,7 +4061,7 @@
                 <a:ea typeface="Inter" pitchFamily="34" charset="-122"/>
                 <a:cs typeface="Inter" pitchFamily="34" charset="-120"/>
               </a:rPr>
-              <a:t> Name the criterion → point back to the source, evidence, or response → ask for one next thinking step.</a:t>
+              <a:t> anticipated barrier → access routine or facilitation question → student thinking move → observable evidence.</a:t>
             </a:r>
             <a:endParaRPr lang="en-US" sz="2000" dirty="0"/>
           </a:p>
@@ -4126,7 +4187,7 @@
         <p:spPr>
           <a:xfrm>
             <a:off x="508000" y="292100"/>
-            <a:ext cx="11430000" cy="482600"/>
+            <a:ext cx="11684000" cy="482600"/>
           </a:xfrm>
           <a:prstGeom prst="rect">
             <a:avLst/>
@@ -4150,7 +4211,7 @@
                 <a:ea typeface="Inter" pitchFamily="34" charset="-122"/>
                 <a:cs typeface="Inter" pitchFamily="34" charset="-120"/>
               </a:rPr>
-              <a:t>Protected Course-Alike Refinement</a:t>
+              <a:t>Protected Lesson-Planning Work</a:t>
             </a:r>
             <a:endParaRPr lang="en-US" sz="3000" dirty="0"/>
           </a:p>
@@ -4189,7 +4250,7 @@
                 <a:ea typeface="Inter" pitchFamily="34" charset="-122"/>
                 <a:cs typeface="Inter" pitchFamily="34" charset="-120"/>
               </a:rPr>
-              <a:t>18:00–30:00  •  12 MIN</a:t>
+              <a:t>18:00–31:00  •  13 MIN</a:t>
             </a:r>
             <a:endParaRPr lang="en-US" sz="1600" dirty="0"/>
           </a:p>
@@ -4287,7 +4348,7 @@
                 <a:ea typeface="Inter" pitchFamily="34" charset="-122"/>
                 <a:cs typeface="Inter" pitchFamily="34" charset="-120"/>
               </a:rPr>
-              <a:t>12 min</a:t>
+              <a:t>13 min</a:t>
             </a:r>
             <a:endParaRPr lang="en-US" sz="7400" dirty="0"/>
           </a:p>
@@ -4351,7 +4412,7 @@
                 <a:ea typeface="Inter" pitchFamily="34" charset="-122"/>
                 <a:cs typeface="Inter" pitchFamily="34" charset="-120"/>
               </a:rPr>
-              <a:t>Draft independently first. Then use colleagues to test clarity, rigor, access, and student responsibility.</a:t>
+              <a:t>Draft independently first. Then use colleagues to check rigor, clarity, access, and student responsibility.</a:t>
             </a:r>
             <a:endParaRPr lang="en-US" sz="2000" dirty="0"/>
           </a:p>
@@ -4418,7 +4479,7 @@
                 <a:ea typeface="Inter" pitchFamily="34" charset="-122"/>
                 <a:cs typeface="Inter" pitchFamily="34" charset="-120"/>
               </a:rPr>
-              <a:t>1. Draft one feedback prompt.</a:t>
+              <a:t>1. Plan the learning experience.</a:t>
             </a:r>
             <a:r>
               <a:rPr lang="en-US" altLang="en-US" sz="2100" dirty="0">
@@ -4429,7 +4490,7 @@
                 <a:ea typeface="Inter" pitchFamily="34" charset="-122"/>
                 <a:cs typeface="Inter" pitchFamily="34" charset="-120"/>
               </a:rPr>
-              <a:t> Name the chosen criterion and point students back to their source, data, model, investigation, or response.</a:t>
+              <a:t> Map the student task, source/visual analysis, academic talk, writing, and a checkpoint toward the mastery bar.</a:t>
             </a:r>
             <a:endParaRPr lang="en-US" sz="2100" dirty="0"/>
           </a:p>
@@ -4496,7 +4557,7 @@
                 <a:ea typeface="Inter" pitchFamily="34" charset="-122"/>
                 <a:cs typeface="Inter" pitchFamily="34" charset="-120"/>
               </a:rPr>
-              <a:t>2. State the student action.</a:t>
+              <a:t>2. Plan written feedback + revision.</a:t>
             </a:r>
             <a:r>
               <a:rPr lang="en-US" altLang="en-US" sz="2100" dirty="0">
@@ -4507,7 +4568,7 @@
                 <a:ea typeface="Inter" pitchFamily="34" charset="-122"/>
                 <a:cs typeface="Inter" pitchFamily="34" charset="-120"/>
               </a:rPr>
-              <a:t> Students will identify, complete, or revise the claim, evidence, or reasoning; then explain, compare, correct, or apply learning.</a:t>
+              <a:t> Write one comment or prompt that names a criterion and asks students to select evidence, explain reasoning, or revise—not copy an answer.</a:t>
             </a:r>
             <a:endParaRPr lang="en-US" sz="2100" dirty="0"/>
           </a:p>
@@ -4574,7 +4635,7 @@
                 <a:ea typeface="Inter" pitchFamily="34" charset="-122"/>
                 <a:cs typeface="Inter" pitchFamily="34" charset="-120"/>
               </a:rPr>
-              <a:t>3. Set the evidence look-for.</a:t>
+              <a:t>3. Plan the evidence look-for.</a:t>
             </a:r>
             <a:r>
               <a:rPr lang="en-US" altLang="en-US" sz="2100" dirty="0">
@@ -4585,7 +4646,7 @@
                 <a:ea typeface="Inter" pitchFamily="34" charset="-122"/>
                 <a:cs typeface="Inter" pitchFamily="34" charset="-120"/>
               </a:rPr>
-              <a:t> What completed or revised CER would show the action worked and met the criterion? Use CUBS/CER only where it makes the thinking easier to see.</a:t>
+              <a:t> Name what a completed or revised response will show about the priority standard and what you will bring to Friday’s student-work analysis.</a:t>
             </a:r>
             <a:endParaRPr lang="en-US" sz="2100" dirty="0"/>
           </a:p>
@@ -4711,7 +4772,7 @@
         <p:spPr>
           <a:xfrm>
             <a:off x="508000" y="292100"/>
-            <a:ext cx="11430000" cy="482600"/>
+            <a:ext cx="12192000" cy="482600"/>
           </a:xfrm>
           <a:prstGeom prst="rect">
             <a:avLst/>
@@ -4735,7 +4796,7 @@
                 <a:ea typeface="Inter" pitchFamily="34" charset="-122"/>
                 <a:cs typeface="Inter" pitchFamily="34" charset="-120"/>
               </a:rPr>
-              <a:t>Prepare One Calibration Artifact for Wednesday</a:t>
+              <a:t>Prepare a Student-Facing Strategy for Wednesday PD</a:t>
             </a:r>
             <a:endParaRPr lang="en-US" sz="3000" dirty="0"/>
           </a:p>
@@ -4774,7 +4835,7 @@
                 <a:ea typeface="Inter" pitchFamily="34" charset="-122"/>
                 <a:cs typeface="Inter" pitchFamily="34" charset="-120"/>
               </a:rPr>
-              <a:t>30:00–36:00  •  6 MIN</a:t>
+              <a:t>31:00–36:00  •  5 MIN</a:t>
             </a:r>
             <a:endParaRPr lang="en-US" sz="1600" dirty="0"/>
           </a:p>
@@ -4813,7 +4874,7 @@
                 <a:ea typeface="Inter" pitchFamily="34" charset="-122"/>
                 <a:cs typeface="Inter" pitchFamily="34" charset="-120"/>
               </a:rPr>
-              <a:t>Bring one concrete item from the same benchmark to Wednesday’s 2:30–3:30 p.m. Science Literacy PD so calibration strengthens this work rather than starting over.</a:t>
+              <a:t>Bring one authentic science article, text, data display, model, investigation prompt, or constructed-response task that students can analyze using CUBS and color-coded CER.</a:t>
             </a:r>
             <a:endParaRPr lang="en-US" sz="2300" dirty="0"/>
           </a:p>
@@ -4904,7 +4965,7 @@
                 <a:ea typeface="Inter" pitchFamily="34" charset="-122"/>
                 <a:cs typeface="Inter" pitchFamily="34" charset="-120"/>
               </a:rPr>
-              <a:t>One benchmark task</a:t>
+              <a:t>One source or task</a:t>
             </a:r>
             <a:endParaRPr lang="en-US" sz="2200" dirty="0"/>
           </a:p>
@@ -4927,7 +4988,7 @@
                 <a:ea typeface="Inter" pitchFamily="34" charset="-122"/>
                 <a:cs typeface="Inter" pitchFamily="34" charset="-120"/>
               </a:rPr>
-              <a:t>Prompt, source/evidence, student product, and success criteria or exemplar.</a:t>
+              <a:t>Article, visual, graph, data set, model, investigation prompt, or written-response question.</a:t>
             </a:r>
             <a:endParaRPr lang="en-US" sz="2200" dirty="0"/>
           </a:p>
@@ -5018,7 +5079,7 @@
                 <a:ea typeface="Inter" pitchFamily="34" charset="-122"/>
                 <a:cs typeface="Inter" pitchFamily="34" charset="-120"/>
               </a:rPr>
-              <a:t>One response to discuss</a:t>
+              <a:t>One student routine</a:t>
             </a:r>
             <a:endParaRPr lang="en-US" sz="2200" dirty="0"/>
           </a:p>
@@ -5041,7 +5102,7 @@
                 <a:ea typeface="Inter" pitchFamily="34" charset="-122"/>
                 <a:cs typeface="Inter" pitchFamily="34" charset="-120"/>
               </a:rPr>
-              <a:t>A de-identified student sample, a planned exemplar, or an anticipated partial response.</a:t>
+              <a:t>What will students circle, underline, box, summarize, color-code, or explain?</a:t>
             </a:r>
             <a:endParaRPr lang="en-US" sz="2200" dirty="0"/>
           </a:p>
@@ -5132,7 +5193,7 @@
                 <a:ea typeface="Inter" pitchFamily="34" charset="-122"/>
                 <a:cs typeface="Inter" pitchFamily="34" charset="-120"/>
               </a:rPr>
-              <a:t>One feedback challenge</a:t>
+              <a:t>One check for understanding</a:t>
             </a:r>
             <a:endParaRPr lang="en-US" sz="2200" dirty="0"/>
           </a:p>
@@ -5155,7 +5216,7 @@
                 <a:ea typeface="Inter" pitchFamily="34" charset="-122"/>
                 <a:cs typeface="Inter" pitchFamily="34" charset="-120"/>
               </a:rPr>
-              <a:t>A prompt and student action that need to be clearer, more specific, or more usable.</a:t>
+              <a:t>A prompt, partner talk, annotation check, or short written response that makes thinking visible.</a:t>
             </a:r>
             <a:endParaRPr lang="en-US" sz="2200" dirty="0"/>
           </a:p>
@@ -5225,7 +5286,7 @@
                 <a:ea typeface="Inter" pitchFamily="34" charset="-122"/>
                 <a:cs typeface="Inter" pitchFamily="34" charset="-120"/>
               </a:rPr>
-              <a:t> calibrate expectations for the same task, criteria, feedback, revision, and next evidence—not teacher or course comparisons.</a:t>
+              <a:t> learn and rehearse student-facing science-literacy routines; adapt them to your own course task.</a:t>
             </a:r>
             <a:endParaRPr lang="en-US" sz="1900" dirty="0"/>
           </a:p>
@@ -5304,7 +5365,7 @@
     <p:bg>
       <p:bgPr>
         <a:solidFill>
-          <a:srgbClr val="202124"/>
+          <a:srgbClr val="FFFFFF"/>
         </a:solidFill>
       </p:bgPr>
     </p:bg>
@@ -5331,27 +5392,27 @@
         <p:spPr>
           <a:xfrm>
             <a:off x="0" y="0"/>
-            <a:ext cx="355600" cy="9144000"/>
-          </a:xfrm>
-          <a:prstGeom prst="rect">
-            <a:avLst/>
-          </a:prstGeom>
-          <a:solidFill>
-            <a:srgbClr val="C41220"/>
-          </a:solidFill>
-          <a:ln/>
-        </p:spPr>
-      </p:sp>
-      <p:sp>
-        <p:nvSpPr>
-          <p:cNvPr id="3" name="close-kicker"/>
-          <p:cNvSpPr/>
-          <p:nvPr/>
-        </p:nvSpPr>
-        <p:spPr>
-          <a:xfrm>
-            <a:off x="889000" y="1168400"/>
-            <a:ext cx="10414000" cy="330200"/>
+            <a:ext cx="16256000" cy="1016000"/>
+          </a:xfrm>
+          <a:prstGeom prst="rect">
+            <a:avLst/>
+          </a:prstGeom>
+          <a:solidFill>
+            <a:srgbClr val="202124"/>
+          </a:solidFill>
+          <a:ln/>
+        </p:spPr>
+      </p:sp>
+      <p:sp>
+        <p:nvSpPr>
+          <p:cNvPr id="3" name="kicker"/>
+          <p:cNvSpPr/>
+          <p:nvPr/>
+        </p:nvSpPr>
+        <p:spPr>
+          <a:xfrm>
+            <a:off x="736600" y="342900"/>
+            <a:ext cx="11430000" cy="330200"/>
           </a:xfrm>
           <a:prstGeom prst="rect">
             <a:avLst/>
@@ -5367,29 +5428,29 @@
               <a:buNone/>
             </a:pPr>
             <a:r>
-              <a:rPr lang="en-US" altLang="en-US" sz="1700" dirty="0">
-                <a:solidFill>
-                  <a:srgbClr val="D1D5DB"/>
-                </a:solidFill>
-                <a:latin typeface="Inter" pitchFamily="34" charset="0"/>
-                <a:ea typeface="Inter" pitchFamily="34" charset="-122"/>
-                <a:cs typeface="Inter" pitchFamily="34" charset="-120"/>
-              </a:rPr>
-              <a:t>CLOSE + PREPARE FOR CALIBRATION  •  36:00–41:00  •  5 MIN</a:t>
-            </a:r>
-            <a:endParaRPr lang="en-US" sz="1700" dirty="0"/>
-          </a:p>
-        </p:txBody>
-      </p:sp>
-      <p:sp>
-        <p:nvSpPr>
-          <p:cNvPr id="4" name="close-title"/>
-          <p:cNvSpPr/>
-          <p:nvPr/>
-        </p:nvSpPr>
-        <p:spPr>
-          <a:xfrm>
-            <a:off x="889000" y="1917700"/>
+              <a:rPr lang="en-US" altLang="en-US" sz="1600" dirty="0">
+                <a:solidFill>
+                  <a:srgbClr val="F1F3F4"/>
+                </a:solidFill>
+                <a:latin typeface="Inter" pitchFamily="34" charset="0"/>
+                <a:ea typeface="Inter" pitchFamily="34" charset="-122"/>
+                <a:cs typeface="Inter" pitchFamily="34" charset="-120"/>
+              </a:rPr>
+              <a:t>CLOSE + PREPARE  •  36:00–41:00  •  5 MIN</a:t>
+            </a:r>
+            <a:endParaRPr lang="en-US" sz="1600" dirty="0"/>
+          </a:p>
+        </p:txBody>
+      </p:sp>
+      <p:sp>
+        <p:nvSpPr>
+          <p:cNvPr id="4" name="title"/>
+          <p:cNvSpPr/>
+          <p:nvPr/>
+        </p:nvSpPr>
+        <p:spPr>
+          <a:xfrm>
+            <a:off x="736600" y="1689100"/>
             <a:ext cx="13081000" cy="787400"/>
           </a:xfrm>
           <a:prstGeom prst="rect">
@@ -5406,17 +5467,17 @@
               <a:buNone/>
             </a:pPr>
             <a:r>
-              <a:rPr lang="en-US" altLang="en-US" sz="4400" dirty="0">
-                <a:solidFill>
-                  <a:srgbClr val="FFFFFF"/>
-                </a:solidFill>
-                <a:latin typeface="Inter" pitchFamily="34" charset="0"/>
-                <a:ea typeface="Inter" pitchFamily="34" charset="-122"/>
-                <a:cs typeface="Inter" pitchFamily="34" charset="-120"/>
-              </a:rPr>
-              <a:t>Carry a usable feedback loop into Wednesday.</a:t>
-            </a:r>
-            <a:endParaRPr lang="en-US" sz="4400" dirty="0"/>
+              <a:rPr lang="en-US" altLang="en-US" sz="4300" dirty="0">
+                <a:solidFill>
+                  <a:srgbClr val="202124"/>
+                </a:solidFill>
+                <a:latin typeface="Inter" pitchFamily="34" charset="0"/>
+                <a:ea typeface="Inter" pitchFamily="34" charset="-122"/>
+                <a:cs typeface="Inter" pitchFamily="34" charset="-120"/>
+              </a:rPr>
+              <a:t>Teach the task. Use the routine. Make student thinking visible.</a:t>
+            </a:r>
+            <a:endParaRPr lang="en-US" sz="4300" dirty="0"/>
           </a:p>
         </p:txBody>
       </p:sp>
@@ -5428,18 +5489,18 @@
         </p:nvSpPr>
         <p:spPr>
           <a:xfrm>
-            <a:off x="889000" y="3263900"/>
-            <a:ext cx="13716000" cy="3733800"/>
-          </a:xfrm>
-          <a:prstGeom prst="rect">
-            <a:avLst/>
-          </a:prstGeom>
-          <a:solidFill>
-            <a:srgbClr val="2D2E31"/>
+            <a:off x="736600" y="3136900"/>
+            <a:ext cx="14706600" cy="3505200"/>
+          </a:xfrm>
+          <a:prstGeom prst="rect">
+            <a:avLst/>
+          </a:prstGeom>
+          <a:solidFill>
+            <a:srgbClr val="F3F4F6"/>
           </a:solidFill>
           <a:ln w="12700">
             <a:solidFill>
-              <a:srgbClr val="72777D"/>
+              <a:srgbClr val="D1D5DB"/>
             </a:solidFill>
             <a:prstDash val="solid"/>
           </a:ln>
@@ -5447,14 +5508,89 @@
       </p:sp>
       <p:sp>
         <p:nvSpPr>
-          <p:cNvPr id="6" name="close-list"/>
-          <p:cNvSpPr/>
-          <p:nvPr/>
-        </p:nvSpPr>
-        <p:spPr>
-          <a:xfrm>
-            <a:off x="1422400" y="3708400"/>
-            <a:ext cx="12522200" cy="2717800"/>
+          <p:cNvPr id="6" name="close-shape-5"/>
+          <p:cNvSpPr/>
+          <p:nvPr/>
+        </p:nvSpPr>
+        <p:spPr>
+          <a:xfrm>
+            <a:off x="1092200" y="3543300"/>
+            <a:ext cx="4292600" cy="2324100"/>
+          </a:xfrm>
+          <a:prstGeom prst="rect">
+            <a:avLst/>
+          </a:prstGeom>
+          <a:solidFill>
+            <a:srgbClr val="FCE8EA"/>
+          </a:solidFill>
+          <a:ln w="12700">
+            <a:solidFill>
+              <a:srgbClr val="C41220"/>
+            </a:solidFill>
+            <a:prstDash val="solid"/>
+          </a:ln>
+        </p:spPr>
+      </p:sp>
+      <p:sp>
+        <p:nvSpPr>
+          <p:cNvPr id="7" name="close-shape-6"/>
+          <p:cNvSpPr/>
+          <p:nvPr/>
+        </p:nvSpPr>
+        <p:spPr>
+          <a:xfrm>
+            <a:off x="5981700" y="3543300"/>
+            <a:ext cx="4292600" cy="2324100"/>
+          </a:xfrm>
+          <a:prstGeom prst="rect">
+            <a:avLst/>
+          </a:prstGeom>
+          <a:solidFill>
+            <a:srgbClr val="F8F9FA"/>
+          </a:solidFill>
+          <a:ln w="12700">
+            <a:solidFill>
+              <a:srgbClr val="D1D5DB"/>
+            </a:solidFill>
+            <a:prstDash val="solid"/>
+          </a:ln>
+        </p:spPr>
+      </p:sp>
+      <p:sp>
+        <p:nvSpPr>
+          <p:cNvPr id="8" name="close-shape-7"/>
+          <p:cNvSpPr/>
+          <p:nvPr/>
+        </p:nvSpPr>
+        <p:spPr>
+          <a:xfrm>
+            <a:off x="10871200" y="3543300"/>
+            <a:ext cx="4216400" cy="2324100"/>
+          </a:xfrm>
+          <a:prstGeom prst="rect">
+            <a:avLst/>
+          </a:prstGeom>
+          <a:solidFill>
+            <a:srgbClr val="F8F9FA"/>
+          </a:solidFill>
+          <a:ln w="12700">
+            <a:solidFill>
+              <a:srgbClr val="D1D5DB"/>
+            </a:solidFill>
+            <a:prstDash val="solid"/>
+          </a:ln>
+        </p:spPr>
+      </p:sp>
+      <p:sp>
+        <p:nvSpPr>
+          <p:cNvPr id="9" name="item1"/>
+          <p:cNvSpPr/>
+          <p:nvPr/>
+        </p:nvSpPr>
+        <p:spPr>
+          <a:xfrm>
+            <a:off x="1346200" y="3835400"/>
+            <a:ext cx="3784600" cy="1714500"/>
           </a:xfrm>
           <a:prstGeom prst="rect">
             <a:avLst/>
@@ -5468,131 +5604,188 @@
           <a:p>
             <a:pPr algn="l" indent="0" marL="0">
               <a:lnSpc>
-                <a:spcPts val="2875"/>
+                <a:spcPts val="1680"/>
               </a:lnSpc>
               <a:buNone/>
             </a:pPr>
             <a:r>
-              <a:rPr lang="en-US" altLang="en-US" sz="2300" b="1" dirty="0">
-                <a:solidFill>
-                  <a:srgbClr val="F6B4BA"/>
-                </a:solidFill>
-                <a:latin typeface="Inter" pitchFamily="34" charset="0"/>
-                <a:ea typeface="Inter" pitchFamily="34" charset="-122"/>
-                <a:cs typeface="Inter" pitchFamily="34" charset="-120"/>
-              </a:rPr>
-              <a:t>Before you leave, confirm:</a:t>
-            </a:r>
-            <a:endParaRPr lang="en-US" sz="2300" dirty="0"/>
-          </a:p>
-          <a:p>
-            <a:pPr algn="l" marL="365125" indent="-365125">
+              <a:rPr lang="en-US" altLang="en-US" sz="1400" b="1" dirty="0">
+                <a:solidFill>
+                  <a:srgbClr val="C41220"/>
+                </a:solidFill>
+                <a:latin typeface="Inter" pitchFamily="34" charset="0"/>
+                <a:ea typeface="Inter" pitchFamily="34" charset="-122"/>
+                <a:cs typeface="Inter" pitchFamily="34" charset="-120"/>
+              </a:rPr>
+              <a:t>WEDNESDAY PD</a:t>
+            </a:r>
+            <a:endParaRPr lang="en-US" sz="2000" dirty="0"/>
+          </a:p>
+          <a:p>
+            <a:pPr algn="l" indent="0" marL="0">
               <a:lnSpc>
-                <a:spcPts val="2875"/>
+                <a:spcPts val="2400"/>
               </a:lnSpc>
               <a:spcBef>
-                <a:spcPts val="10"/>
+                <a:spcPts val="900"/>
               </a:spcBef>
-              <a:buSzPct val="100000"/>
-              <a:buChar char="•"/>
-            </a:pPr>
-            <a:r>
-              <a:rPr lang="en-US" altLang="en-US" sz="2300" dirty="0">
-                <a:solidFill>
-                  <a:srgbClr val="FFFFFF"/>
-                </a:solidFill>
-                <a:latin typeface="Inter" pitchFamily="34" charset="0"/>
-                <a:ea typeface="Inter" pitchFamily="34" charset="-122"/>
-                <a:cs typeface="Inter" pitchFamily="34" charset="-120"/>
-              </a:rPr>
-              <a:t>the benchmark task and priority criterion remain visible;</a:t>
-            </a:r>
-            <a:endParaRPr lang="en-US" sz="2300" dirty="0"/>
-          </a:p>
-          <a:p>
-            <a:pPr algn="l" marL="365125" indent="-365125">
+              <a:buNone/>
+            </a:pPr>
+            <a:r>
+              <a:rPr lang="en-US" altLang="en-US" sz="2000" b="1" dirty="0">
+                <a:solidFill>
+                  <a:srgbClr val="3C4043"/>
+                </a:solidFill>
+                <a:latin typeface="Inter" pitchFamily="34" charset="0"/>
+                <a:ea typeface="Inter" pitchFamily="34" charset="-122"/>
+                <a:cs typeface="Inter" pitchFamily="34" charset="-120"/>
+              </a:rPr>
+              <a:t>Bring one source/task and a student-facing CUBS/CER plan.</a:t>
+            </a:r>
+            <a:endParaRPr lang="en-US" sz="2000" dirty="0"/>
+          </a:p>
+        </p:txBody>
+      </p:sp>
+      <p:sp>
+        <p:nvSpPr>
+          <p:cNvPr id="10" name="item2"/>
+          <p:cNvSpPr/>
+          <p:nvPr/>
+        </p:nvSpPr>
+        <p:spPr>
+          <a:xfrm>
+            <a:off x="6235700" y="3835400"/>
+            <a:ext cx="3784600" cy="1714500"/>
+          </a:xfrm>
+          <a:prstGeom prst="rect">
+            <a:avLst/>
+          </a:prstGeom>
+          <a:noFill/>
+          <a:ln/>
+        </p:spPr>
+        <p:txBody>
+          <a:bodyPr wrap="square" lIns="0" tIns="0" rIns="0" bIns="0" rtlCol="0" anchor="t"/>
+          <a:lstStyle/>
+          <a:p>
+            <a:pPr algn="l" indent="0" marL="0">
               <a:lnSpc>
-                <a:spcPts val="2875"/>
+                <a:spcPts val="1680"/>
+              </a:lnSpc>
+              <a:buNone/>
+            </a:pPr>
+            <a:r>
+              <a:rPr lang="en-US" altLang="en-US" sz="1400" b="1" dirty="0">
+                <a:solidFill>
+                  <a:srgbClr val="C41220"/>
+                </a:solidFill>
+                <a:latin typeface="Inter" pitchFamily="34" charset="0"/>
+                <a:ea typeface="Inter" pitchFamily="34" charset="-122"/>
+                <a:cs typeface="Inter" pitchFamily="34" charset="-120"/>
+              </a:rPr>
+              <a:t>IMPLEMENT</a:t>
+            </a:r>
+            <a:endParaRPr lang="en-US" sz="2000" dirty="0"/>
+          </a:p>
+          <a:p>
+            <a:pPr algn="l" indent="0" marL="0">
+              <a:lnSpc>
+                <a:spcPts val="2400"/>
               </a:lnSpc>
               <a:spcBef>
-                <a:spcPts val="10"/>
+                <a:spcPts val="900"/>
               </a:spcBef>
-              <a:buSzPct val="100000"/>
-              <a:buChar char="•"/>
-            </a:pPr>
-            <a:r>
-              <a:rPr lang="en-US" altLang="en-US" sz="2300" dirty="0">
-                <a:solidFill>
-                  <a:srgbClr val="FFFFFF"/>
-                </a:solidFill>
-                <a:latin typeface="Inter" pitchFamily="34" charset="0"/>
-                <a:ea typeface="Inter" pitchFamily="34" charset="-122"/>
-                <a:cs typeface="Inter" pitchFamily="34" charset="-120"/>
-              </a:rPr>
-              <a:t>your feedback prompt sends students to a specific next thinking step;</a:t>
-            </a:r>
-            <a:endParaRPr lang="en-US" sz="2300" dirty="0"/>
-          </a:p>
-          <a:p>
-            <a:pPr algn="l" marL="365125" indent="-365125">
+              <a:buNone/>
+            </a:pPr>
+            <a:r>
+              <a:rPr lang="en-US" altLang="en-US" sz="2000" b="1" dirty="0">
+                <a:solidFill>
+                  <a:srgbClr val="3C4043"/>
+                </a:solidFill>
+                <a:latin typeface="Inter" pitchFamily="34" charset="0"/>
+                <a:ea typeface="Inter" pitchFamily="34" charset="-122"/>
+                <a:cs typeface="Inter" pitchFamily="34" charset="-120"/>
+              </a:rPr>
+              <a:t>Teach the planned learning experience and feedback/revision step.</a:t>
+            </a:r>
+            <a:endParaRPr lang="en-US" sz="2000" dirty="0"/>
+          </a:p>
+        </p:txBody>
+      </p:sp>
+      <p:sp>
+        <p:nvSpPr>
+          <p:cNvPr id="11" name="item3"/>
+          <p:cNvSpPr/>
+          <p:nvPr/>
+        </p:nvSpPr>
+        <p:spPr>
+          <a:xfrm>
+            <a:off x="11125200" y="3835400"/>
+            <a:ext cx="3708400" cy="1714500"/>
+          </a:xfrm>
+          <a:prstGeom prst="rect">
+            <a:avLst/>
+          </a:prstGeom>
+          <a:noFill/>
+          <a:ln/>
+        </p:spPr>
+        <p:txBody>
+          <a:bodyPr wrap="square" lIns="0" tIns="0" rIns="0" bIns="0" rtlCol="0" anchor="t"/>
+          <a:lstStyle/>
+          <a:p>
+            <a:pPr algn="l" indent="0" marL="0">
               <a:lnSpc>
-                <a:spcPts val="2875"/>
+                <a:spcPts val="1680"/>
+              </a:lnSpc>
+              <a:buNone/>
+            </a:pPr>
+            <a:r>
+              <a:rPr lang="en-US" altLang="en-US" sz="1400" b="1" dirty="0">
+                <a:solidFill>
+                  <a:srgbClr val="C41220"/>
+                </a:solidFill>
+                <a:latin typeface="Inter" pitchFamily="34" charset="0"/>
+                <a:ea typeface="Inter" pitchFamily="34" charset="-122"/>
+                <a:cs typeface="Inter" pitchFamily="34" charset="-120"/>
+              </a:rPr>
+              <a:t>FRIDAY</a:t>
+            </a:r>
+            <a:endParaRPr lang="en-US" sz="2000" dirty="0"/>
+          </a:p>
+          <a:p>
+            <a:pPr algn="l" indent="0" marL="0">
+              <a:lnSpc>
+                <a:spcPts val="2400"/>
               </a:lnSpc>
               <a:spcBef>
-                <a:spcPts val="10"/>
+                <a:spcPts val="900"/>
               </a:spcBef>
-              <a:buSzPct val="100000"/>
-              <a:buChar char="•"/>
-            </a:pPr>
-            <a:r>
-              <a:rPr lang="en-US" altLang="en-US" sz="2300" dirty="0">
-                <a:solidFill>
-                  <a:srgbClr val="FFFFFF"/>
-                </a:solidFill>
-                <a:latin typeface="Inter" pitchFamily="34" charset="0"/>
-                <a:ea typeface="Inter" pitchFamily="34" charset="-122"/>
-                <a:cs typeface="Inter" pitchFamily="34" charset="-120"/>
-              </a:rPr>
-              <a:t>the student action will produce evidence you can examine; and</a:t>
-            </a:r>
-            <a:endParaRPr lang="en-US" sz="2300" dirty="0"/>
-          </a:p>
-          <a:p>
-            <a:pPr algn="l" marL="365125" indent="-365125">
-              <a:lnSpc>
-                <a:spcPts val="2875"/>
-              </a:lnSpc>
-              <a:spcBef>
-                <a:spcPts val="10"/>
-              </a:spcBef>
-              <a:buSzPct val="100000"/>
-              <a:buChar char="•"/>
-            </a:pPr>
-            <a:r>
-              <a:rPr lang="en-US" altLang="en-US" sz="2300" dirty="0">
-                <a:solidFill>
-                  <a:srgbClr val="FFFFFF"/>
-                </a:solidFill>
-                <a:latin typeface="Inter" pitchFamily="34" charset="0"/>
-                <a:ea typeface="Inter" pitchFamily="34" charset="-122"/>
-                <a:cs typeface="Inter" pitchFamily="34" charset="-120"/>
-              </a:rPr>
-              <a:t>you have one task, sample, or feedback challenge ready for Wednesday.</a:t>
-            </a:r>
-            <a:endParaRPr lang="en-US" sz="2300" dirty="0"/>
-          </a:p>
-        </p:txBody>
-      </p:sp>
-      <p:sp>
-        <p:nvSpPr>
-          <p:cNvPr id="7" name="close-footer"/>
-          <p:cNvSpPr/>
-          <p:nvPr/>
-        </p:nvSpPr>
-        <p:spPr>
-          <a:xfrm>
-            <a:off x="889000" y="7442200"/>
-            <a:ext cx="12700000" cy="533400"/>
+              <a:buNone/>
+            </a:pPr>
+            <a:r>
+              <a:rPr lang="en-US" altLang="en-US" sz="2000" b="1" dirty="0">
+                <a:solidFill>
+                  <a:srgbClr val="3C4043"/>
+                </a:solidFill>
+                <a:latin typeface="Inter" pitchFamily="34" charset="0"/>
+                <a:ea typeface="Inter" pitchFamily="34" charset="-122"/>
+                <a:cs typeface="Inter" pitchFamily="34" charset="-120"/>
+              </a:rPr>
+              <a:t>Bring completed student writing and evidence for a mastery-focused next step.</a:t>
+            </a:r>
+            <a:endParaRPr lang="en-US" sz="2000" dirty="0"/>
+          </a:p>
+        </p:txBody>
+      </p:sp>
+      <p:sp>
+        <p:nvSpPr>
+          <p:cNvPr id="12" name="footer"/>
+          <p:cNvSpPr/>
+          <p:nvPr/>
+        </p:nvSpPr>
+        <p:spPr>
+          <a:xfrm>
+            <a:off x="736600" y="7289800"/>
+            <a:ext cx="14198600" cy="457200"/>
           </a:xfrm>
           <a:prstGeom prst="rect">
             <a:avLst/>
@@ -5604,34 +5797,45 @@
           <a:bodyPr wrap="square" lIns="0" tIns="0" rIns="0" bIns="0" rtlCol="0" anchor="t"/>
           <a:lstStyle/>
           <a:p>
-            <a:pPr algn="l" indent="0" marL="0">
-              <a:buNone/>
-            </a:pPr>
-            <a:r>
-              <a:rPr lang="en-US" altLang="en-US" sz="2300" dirty="0">
-                <a:solidFill>
-                  <a:srgbClr val="F1F3F4"/>
-                </a:solidFill>
-                <a:latin typeface="Inter" pitchFamily="34" charset="0"/>
-                <a:ea typeface="Inter" pitchFamily="34" charset="-122"/>
-                <a:cs typeface="Inter" pitchFamily="34" charset="-120"/>
-              </a:rPr>
-              <a:t>Friday: use resulting writing samples and unit-test evidence where available to identify a learning pattern and adjust the next experience.</a:t>
-            </a:r>
-            <a:endParaRPr lang="en-US" sz="2300" dirty="0"/>
-          </a:p>
-        </p:txBody>
-      </p:sp>
-      <p:sp>
-        <p:nvSpPr>
-          <p:cNvPr id="8" name="page"/>
-          <p:cNvSpPr/>
-          <p:nvPr/>
-        </p:nvSpPr>
-        <p:spPr>
-          <a:xfrm>
-            <a:off x="14478000" y="8407400"/>
-            <a:ext cx="762000" cy="228600"/>
+            <a:pPr algn="ctr" indent="0" marL="0">
+              <a:buNone/>
+            </a:pPr>
+            <a:r>
+              <a:rPr lang="en-US" altLang="en-US" sz="2200" b="1" dirty="0">
+                <a:solidFill>
+                  <a:srgbClr val="C41220"/>
+                </a:solidFill>
+                <a:latin typeface="Inter" pitchFamily="34" charset="0"/>
+                <a:ea typeface="Inter" pitchFamily="34" charset="-122"/>
+                <a:cs typeface="Inter" pitchFamily="34" charset="-120"/>
+              </a:rPr>
+              <a:t>Friday:</a:t>
+            </a:r>
+            <a:r>
+              <a:rPr lang="en-US" altLang="en-US" sz="2200" dirty="0">
+                <a:solidFill>
+                  <a:srgbClr val="3C4043"/>
+                </a:solidFill>
+                <a:latin typeface="Inter" pitchFamily="34" charset="0"/>
+                <a:ea typeface="Inter" pitchFamily="34" charset="-122"/>
+                <a:cs typeface="Inter" pitchFamily="34" charset="-120"/>
+              </a:rPr>
+              <a:t> examine completed benchmark writing, give written feedback, and plan a narrow next learning experience for the standard.</a:t>
+            </a:r>
+            <a:endParaRPr lang="en-US" sz="2200" dirty="0"/>
+          </a:p>
+        </p:txBody>
+      </p:sp>
+      <p:sp>
+        <p:nvSpPr>
+          <p:cNvPr id="13" name="page"/>
+          <p:cNvSpPr/>
+          <p:nvPr/>
+        </p:nvSpPr>
+        <p:spPr>
+          <a:xfrm>
+            <a:off x="14732000" y="8432800"/>
+            <a:ext cx="736600" cy="228600"/>
           </a:xfrm>
           <a:prstGeom prst="rect">
             <a:avLst/>
@@ -5649,7 +5853,7 @@
             <a:r>
               <a:rPr lang="en-US" altLang="en-US" sz="1300" dirty="0">
                 <a:solidFill>
-                  <a:srgbClr val="D1D5DB"/>
+                  <a:srgbClr val="6B7280"/>
                 </a:solidFill>
                 <a:latin typeface="Inter" pitchFamily="34" charset="0"/>
                 <a:ea typeface="Inter" pitchFamily="34" charset="-122"/>
@@ -5663,7 +5867,7 @@
       </p:sp>
       <p:sp>
         <p:nvSpPr>
-          <p:cNvPr id="9" name="close-shape-8"/>
+          <p:cNvPr id="14" name="close-shape-13"/>
           <p:cNvSpPr/>
           <p:nvPr/>
         </p:nvSpPr>
